--- a/docs/01_literature_survey/Literature_Review_Presentation.pptx
+++ b/docs/01_literature_survey/Literature_Review_Presentation.pptx
@@ -124,21 +124,21 @@
   <p:extLst>
     <p:ext uri="{521415D9-36F7-43E2-AB2F-B90AF26B5E84}">
       <p14:sectionLst xmlns:p14="http://schemas.microsoft.com/office/powerpoint/2010/main">
-        <p14:section name="Introduction" id="{0f70bf9b-16fa-e0f9-7ad0-2879c9de8702}">
+        <p14:section name="Introduction" id="{3fc1688b-1faa-4720-fe55-61d4d6e7cdd9}">
           <p14:sldIdLst>
             <p14:sldId id="256"/>
             <p14:sldId id="257"/>
             <p14:sldId id="258"/>
           </p14:sldIdLst>
         </p14:section>
-        <p14:section name="All 30 papers" id="{70dd98b9-1677-6089-5b00-eeeb87bf3037}">
+        <p14:section name="All 30 papers" id="{9609ae0d-b610-f401-556b-d645ddf3f1e8}">
           <p14:sldIdLst>
             <p14:sldId id="259"/>
             <p14:sldId id="260"/>
             <p14:sldId id="261"/>
           </p14:sldIdLst>
         </p14:section>
-        <p14:section name="Base papers" id="{44f3d136-a4db-aada-272c-a3fa8eea78f1}">
+        <p14:section name="Base papers" id="{5c4d15e6-5f01-15eb-cf8f-6f1a051a5260}">
           <p14:sldIdLst>
             <p14:sldId id="262"/>
             <p14:sldId id="263"/>
@@ -150,7 +150,7 @@
             <p14:sldId id="269"/>
           </p14:sldIdLst>
         </p14:section>
-        <p14:section name="Findings and objectives" id="{9f0ebeeb-5c7c-12df-6db3-17b9c6f18a67}">
+        <p14:section name="Findings and objectives" id="{385aed5f-ff25-3ed8-1cde-edd0dd32ced5}">
           <p14:sldIdLst>
             <p14:sldId id="270"/>
             <p14:sldId id="271"/>
@@ -3377,8 +3377,8 @@
         </p:nvSpPr>
         <p:spPr>
           <a:xfrm>
-            <a:off x="731520" y="1371600"/>
-            <a:ext cx="10698480" cy="914400"/>
+            <a:off x="731520" y="1280160"/>
+            <a:ext cx="10698480" cy="1143000"/>
           </a:xfrm>
           <a:prstGeom prst="rect">
             <a:avLst/>
@@ -3394,7 +3394,7 @@
               <a:buNone/>
             </a:pPr>
             <a:r>
-              <a:rPr lang="en-US" sz="4000" b="1" dirty="0">
+              <a:rPr lang="en-US" sz="3400" b="1" dirty="0">
                 <a:solidFill>
                   <a:schemeClr val="bg1"/>
                 </a:solidFill>
@@ -3402,9 +3402,9 @@
                 <a:ea typeface="Cambria" pitchFamily="34" charset="-122"/>
                 <a:cs typeface="Cambria" pitchFamily="34" charset="-120"/>
               </a:rPr>
-              <a:t>Handwritten Modi Character Recognition</a:t>
+              <a:t>Handwritten Modi Character Recognition using Handcrafted Features</a:t>
             </a:r>
-            <a:endParaRPr lang="en-US" sz="4000" dirty="0"/>
+            <a:endParaRPr lang="en-US" sz="3400" dirty="0"/>
           </a:p>
         </p:txBody>
       </p:sp>
@@ -3416,7 +3416,7 @@
         </p:nvSpPr>
         <p:spPr>
           <a:xfrm>
-            <a:off x="731520" y="2286000"/>
+            <a:off x="731520" y="2514600"/>
             <a:ext cx="10698480" cy="457200"/>
           </a:xfrm>
           <a:prstGeom prst="rect">
@@ -3460,7 +3460,7 @@
         </p:blipFill>
         <p:spPr>
           <a:xfrm>
-            <a:off x="731520" y="3154680"/>
+            <a:off x="731520" y="3383280"/>
             <a:ext cx="10698480" cy="1335024"/>
           </a:xfrm>
           <a:prstGeom prst="rect">
